--- a/20261001_サンクスLINEの費用と実績.pptx
+++ b/20261001_サンクスLINEの費用と実績.pptx
@@ -2639,7 +2639,7 @@
 </p:sldMaster>
 </file>
 
-<file path=ppt/slides/slide3.xml><?xml version="1.0" encoding="utf-8"?>
+<file path=ppt/slides/slide1.xml><?xml version="1.0" encoding="utf-8"?>
 <p:sld xmlns:a="http://schemas.openxmlformats.org/drawingml/2006/main" xmlns:r="http://schemas.openxmlformats.org/officeDocument/2006/relationships" xmlns:p="http://schemas.openxmlformats.org/presentationml/2006/main">
   <p:cSld>
     <p:spTree>
@@ -2847,7 +2847,7 @@
         <p:spPr>
           <a:xfrm>
             <a:off x="525600" y="1998000"/>
-            <a:ext cx="2854800" cy="936000"/>
+            <a:ext cx="2854800" cy="1188000"/>
           </a:xfrm>
           <a:prstGeom prst="roundRect">
             <a:avLst>
@@ -2879,7 +2879,7 @@
           </a:fontRef>
         </p:style>
         <p:txBody>
-          <a:bodyPr wrap="square" lIns="54000" tIns="18000" rIns="54000" bIns="18000" rtlCol="0" anchor="ctr"/>
+          <a:bodyPr wrap="square" lIns="954000" tIns="18000" rIns="54000" bIns="18000" rtlCol="0" anchor="ctr"/>
           <a:lstStyle/>
           <a:p>
             <a:pPr algn="ctr">
@@ -2888,7 +2888,7 @@
               </a:lnSpc>
             </a:pPr>
             <a:r>
-              <a:rPr sz="1100" b="0">
+              <a:rPr sz="1000" b="0">
                 <a:solidFill>
                   <a:srgbClr val="333333"/>
                 </a:solidFill>
@@ -2896,7 +2896,7 @@
                 <a:ea typeface="メイリオ"/>
                 <a:cs typeface="メイリオ"/>
               </a:rPr>
-              <a:t>完了画面からLINEへ（サンクスLINE）</a:t>
+              <a:t>完了画面からLINEへ</a:t>
             </a:r>
           </a:p>
           <a:p>
@@ -2906,7 +2906,7 @@
               </a:lnSpc>
             </a:pPr>
             <a:r>
-              <a:rPr sz="1800" b="1">
+              <a:rPr sz="1700" b="1">
                 <a:solidFill>
                   <a:srgbClr val="1F285A"/>
                 </a:solidFill>
@@ -2914,7 +2914,25 @@
                 <a:ea typeface="メイリオ"/>
                 <a:cs typeface="メイリオ"/>
               </a:rPr>
-              <a:t>来院率 40〜50%改善</a:t>
+              <a:t>来院率</a:t>
+            </a:r>
+          </a:p>
+          <a:p>
+            <a:pPr algn="ctr">
+              <a:lnSpc>
+                <a:spcPct val="120000"/>
+              </a:lnSpc>
+            </a:pPr>
+            <a:r>
+              <a:rPr sz="1700" b="1">
+                <a:solidFill>
+                  <a:srgbClr val="1F285A"/>
+                </a:solidFill>
+                <a:latin typeface="メイリオ"/>
+                <a:ea typeface="メイリオ"/>
+                <a:cs typeface="メイリオ"/>
+              </a:rPr>
+              <a:t>40〜50%改善</a:t>
             </a:r>
           </a:p>
         </p:txBody>
@@ -2989,7 +3007,7 @@
         <p:spPr>
           <a:xfrm>
             <a:off x="3524399" y="1998000"/>
-            <a:ext cx="2854800" cy="936000"/>
+            <a:ext cx="2854800" cy="1188000"/>
           </a:xfrm>
           <a:prstGeom prst="roundRect">
             <a:avLst>
@@ -3021,7 +3039,7 @@
           </a:fontRef>
         </p:style>
         <p:txBody>
-          <a:bodyPr wrap="square" lIns="54000" tIns="18000" rIns="54000" bIns="18000" rtlCol="0" anchor="ctr"/>
+          <a:bodyPr wrap="square" lIns="954000" tIns="18000" rIns="54000" bIns="18000" rtlCol="0" anchor="ctr"/>
           <a:lstStyle/>
           <a:p>
             <a:pPr algn="ctr">
@@ -3030,7 +3048,7 @@
               </a:lnSpc>
             </a:pPr>
             <a:r>
-              <a:rPr sz="1100" b="0">
+              <a:rPr sz="1000" b="0">
                 <a:solidFill>
                   <a:srgbClr val="333333"/>
                 </a:solidFill>
@@ -3048,7 +3066,7 @@
               </a:lnSpc>
             </a:pPr>
             <a:r>
-              <a:rPr sz="1800" b="1">
+              <a:rPr sz="1700" b="1">
                 <a:solidFill>
                   <a:srgbClr val="1F285A"/>
                 </a:solidFill>
@@ -3056,7 +3074,25 @@
                 <a:ea typeface="メイリオ"/>
                 <a:cs typeface="メイリオ"/>
               </a:rPr>
-              <a:t>面談実施率 ＋5ポイント</a:t>
+              <a:t>面談実施率</a:t>
+            </a:r>
+          </a:p>
+          <a:p>
+            <a:pPr algn="ctr">
+              <a:lnSpc>
+                <a:spcPct val="120000"/>
+              </a:lnSpc>
+            </a:pPr>
+            <a:r>
+              <a:rPr sz="1700" b="1">
+                <a:solidFill>
+                  <a:srgbClr val="1F285A"/>
+                </a:solidFill>
+                <a:latin typeface="メイリオ"/>
+                <a:ea typeface="メイリオ"/>
+                <a:cs typeface="メイリオ"/>
+              </a:rPr>
+              <a:t>＋5ポイント</a:t>
             </a:r>
           </a:p>
         </p:txBody>
@@ -3131,7 +3167,7 @@
         <p:spPr>
           <a:xfrm>
             <a:off x="6523200" y="1998000"/>
-            <a:ext cx="2854800" cy="936000"/>
+            <a:ext cx="2854800" cy="1188000"/>
           </a:xfrm>
           <a:prstGeom prst="roundRect">
             <a:avLst>
@@ -3163,7 +3199,7 @@
           </a:fontRef>
         </p:style>
         <p:txBody>
-          <a:bodyPr wrap="square" lIns="54000" tIns="18000" rIns="54000" bIns="18000" rtlCol="0" anchor="ctr"/>
+          <a:bodyPr wrap="square" lIns="954000" tIns="18000" rIns="54000" bIns="18000" rtlCol="0" anchor="ctr"/>
           <a:lstStyle/>
           <a:p>
             <a:pPr algn="ctr">
@@ -3172,7 +3208,7 @@
               </a:lnSpc>
             </a:pPr>
             <a:r>
-              <a:rPr sz="1100" b="0">
+              <a:rPr sz="1000" b="0">
                 <a:solidFill>
                   <a:srgbClr val="333333"/>
                 </a:solidFill>
@@ -3190,7 +3226,7 @@
               </a:lnSpc>
             </a:pPr>
             <a:r>
-              <a:rPr sz="1800" b="1">
+              <a:rPr sz="1700" b="1">
                 <a:solidFill>
                   <a:srgbClr val="1F285A"/>
                 </a:solidFill>
@@ -3198,7 +3234,25 @@
                 <a:ea typeface="メイリオ"/>
                 <a:cs typeface="メイリオ"/>
               </a:rPr>
-              <a:t>友だち追加 約70%</a:t>
+              <a:t>友だち追加</a:t>
+            </a:r>
+          </a:p>
+          <a:p>
+            <a:pPr algn="ctr">
+              <a:lnSpc>
+                <a:spcPct val="120000"/>
+              </a:lnSpc>
+            </a:pPr>
+            <a:r>
+              <a:rPr sz="1700" b="1">
+                <a:solidFill>
+                  <a:srgbClr val="1F285A"/>
+                </a:solidFill>
+                <a:latin typeface="メイリオ"/>
+                <a:ea typeface="メイリオ"/>
+                <a:cs typeface="メイリオ"/>
+              </a:rPr>
+              <a:t>約70%</a:t>
             </a:r>
           </a:p>
         </p:txBody>
@@ -3211,7 +3265,7 @@
         </p:nvSpPr>
         <p:spPr>
           <a:xfrm>
-            <a:off x="525600" y="3024000"/>
+            <a:off x="525600" y="3221999"/>
             <a:ext cx="2854800" cy="324000"/>
           </a:xfrm>
           <a:prstGeom prst="roundRect">
@@ -3272,8 +3326,8 @@
         </p:nvSpPr>
         <p:spPr>
           <a:xfrm>
-            <a:off x="525600" y="3384000"/>
-            <a:ext cx="2854800" cy="936000"/>
+            <a:off x="525600" y="3581999"/>
+            <a:ext cx="2854800" cy="1188000"/>
           </a:xfrm>
           <a:prstGeom prst="roundRect">
             <a:avLst>
@@ -3305,7 +3359,7 @@
           </a:fontRef>
         </p:style>
         <p:txBody>
-          <a:bodyPr wrap="square" lIns="54000" tIns="18000" rIns="54000" bIns="18000" rtlCol="0" anchor="ctr"/>
+          <a:bodyPr wrap="square" lIns="954000" tIns="18000" rIns="54000" bIns="18000" rtlCol="0" anchor="ctr"/>
           <a:lstStyle/>
           <a:p>
             <a:pPr algn="ctr">
@@ -3314,7 +3368,7 @@
               </a:lnSpc>
             </a:pPr>
             <a:r>
-              <a:rPr sz="1100" b="0">
+              <a:rPr sz="1000" b="0">
                 <a:solidFill>
                   <a:srgbClr val="333333"/>
                 </a:solidFill>
@@ -3332,7 +3386,7 @@
               </a:lnSpc>
             </a:pPr>
             <a:r>
-              <a:rPr sz="1800" b="1">
+              <a:rPr sz="1700" b="1">
                 <a:solidFill>
                   <a:srgbClr val="1F285A"/>
                 </a:solidFill>
@@ -3340,7 +3394,25 @@
                 <a:ea typeface="メイリオ"/>
                 <a:cs typeface="メイリオ"/>
               </a:rPr>
-              <a:t>予約数 約120%</a:t>
+              <a:t>予約数</a:t>
+            </a:r>
+          </a:p>
+          <a:p>
+            <a:pPr algn="ctr">
+              <a:lnSpc>
+                <a:spcPct val="120000"/>
+              </a:lnSpc>
+            </a:pPr>
+            <a:r>
+              <a:rPr sz="1700" b="1">
+                <a:solidFill>
+                  <a:srgbClr val="1F285A"/>
+                </a:solidFill>
+                <a:latin typeface="メイリオ"/>
+                <a:ea typeface="メイリオ"/>
+                <a:cs typeface="メイリオ"/>
+              </a:rPr>
+              <a:t>約120%</a:t>
             </a:r>
           </a:p>
         </p:txBody>
@@ -3353,7 +3425,7 @@
         </p:nvSpPr>
         <p:spPr>
           <a:xfrm>
-            <a:off x="3524399" y="3024000"/>
+            <a:off x="3524399" y="3221999"/>
             <a:ext cx="2854800" cy="324000"/>
           </a:xfrm>
           <a:prstGeom prst="roundRect">
@@ -3414,8 +3486,8 @@
         </p:nvSpPr>
         <p:spPr>
           <a:xfrm>
-            <a:off x="3524399" y="3384000"/>
-            <a:ext cx="2854800" cy="936000"/>
+            <a:off x="3524399" y="3581999"/>
+            <a:ext cx="2854800" cy="1188000"/>
           </a:xfrm>
           <a:prstGeom prst="roundRect">
             <a:avLst>
@@ -3447,7 +3519,7 @@
           </a:fontRef>
         </p:style>
         <p:txBody>
-          <a:bodyPr wrap="square" lIns="54000" tIns="18000" rIns="54000" bIns="18000" rtlCol="0" anchor="ctr"/>
+          <a:bodyPr wrap="square" lIns="954000" tIns="18000" rIns="54000" bIns="18000" rtlCol="0" anchor="ctr"/>
           <a:lstStyle/>
           <a:p>
             <a:pPr algn="ctr">
@@ -3456,7 +3528,7 @@
               </a:lnSpc>
             </a:pPr>
             <a:r>
-              <a:rPr sz="1100" b="0">
+              <a:rPr sz="1000" b="0">
                 <a:solidFill>
                   <a:srgbClr val="333333"/>
                 </a:solidFill>
@@ -3474,7 +3546,7 @@
               </a:lnSpc>
             </a:pPr>
             <a:r>
-              <a:rPr sz="1800" b="1">
+              <a:rPr sz="1700" b="1">
                 <a:solidFill>
                   <a:srgbClr val="1F285A"/>
                 </a:solidFill>
@@ -3482,7 +3554,25 @@
                 <a:ea typeface="メイリオ"/>
                 <a:cs typeface="メイリオ"/>
               </a:rPr>
-              <a:t>面談予約率 55%</a:t>
+              <a:t>面談予約率</a:t>
+            </a:r>
+          </a:p>
+          <a:p>
+            <a:pPr algn="ctr">
+              <a:lnSpc>
+                <a:spcPct val="120000"/>
+              </a:lnSpc>
+            </a:pPr>
+            <a:r>
+              <a:rPr sz="1700" b="1">
+                <a:solidFill>
+                  <a:srgbClr val="1F285A"/>
+                </a:solidFill>
+                <a:latin typeface="メイリオ"/>
+                <a:ea typeface="メイリオ"/>
+                <a:cs typeface="メイリオ"/>
+              </a:rPr>
+              <a:t>55%</a:t>
             </a:r>
           </a:p>
         </p:txBody>
@@ -3495,7 +3585,7 @@
         </p:nvSpPr>
         <p:spPr>
           <a:xfrm>
-            <a:off x="6523200" y="3024000"/>
+            <a:off x="6523200" y="3221999"/>
             <a:ext cx="2854800" cy="324000"/>
           </a:xfrm>
           <a:prstGeom prst="roundRect">
@@ -3556,8 +3646,8 @@
         </p:nvSpPr>
         <p:spPr>
           <a:xfrm>
-            <a:off x="6523200" y="3384000"/>
-            <a:ext cx="2854800" cy="936000"/>
+            <a:off x="6523200" y="3581999"/>
+            <a:ext cx="2854800" cy="1188000"/>
           </a:xfrm>
           <a:prstGeom prst="roundRect">
             <a:avLst>
@@ -3589,7 +3679,7 @@
           </a:fontRef>
         </p:style>
         <p:txBody>
-          <a:bodyPr wrap="square" lIns="54000" tIns="18000" rIns="54000" bIns="18000" rtlCol="0" anchor="ctr"/>
+          <a:bodyPr wrap="square" lIns="954000" tIns="18000" rIns="54000" bIns="18000" rtlCol="0" anchor="ctr"/>
           <a:lstStyle/>
           <a:p>
             <a:pPr algn="ctr">
@@ -3598,7 +3688,7 @@
               </a:lnSpc>
             </a:pPr>
             <a:r>
-              <a:rPr sz="1100" b="0">
+              <a:rPr sz="1000" b="0">
                 <a:solidFill>
                   <a:srgbClr val="333333"/>
                 </a:solidFill>
@@ -3616,7 +3706,7 @@
               </a:lnSpc>
             </a:pPr>
             <a:r>
-              <a:rPr sz="1800" b="1">
+              <a:rPr sz="1700" b="1">
                 <a:solidFill>
                   <a:srgbClr val="1F285A"/>
                 </a:solidFill>
@@ -3624,7 +3714,25 @@
                 <a:ea typeface="メイリオ"/>
                 <a:cs typeface="メイリオ"/>
               </a:rPr>
-              <a:t>当日に来店 約40%</a:t>
+              <a:t>当日に来店</a:t>
+            </a:r>
+          </a:p>
+          <a:p>
+            <a:pPr algn="ctr">
+              <a:lnSpc>
+                <a:spcPct val="120000"/>
+              </a:lnSpc>
+            </a:pPr>
+            <a:r>
+              <a:rPr sz="1700" b="1">
+                <a:solidFill>
+                  <a:srgbClr val="1F285A"/>
+                </a:solidFill>
+                <a:latin typeface="メイリオ"/>
+                <a:ea typeface="メイリオ"/>
+                <a:cs typeface="メイリオ"/>
+              </a:rPr>
+              <a:t>約40%</a:t>
             </a:r>
           </a:p>
         </p:txBody>
@@ -3637,7 +3745,7 @@
         </p:nvSpPr>
         <p:spPr>
           <a:xfrm>
-            <a:off x="525600" y="4482000"/>
+            <a:off x="525600" y="4860000"/>
             <a:ext cx="1080000" cy="468000"/>
           </a:xfrm>
           <a:prstGeom prst="roundRect">
@@ -3698,7 +3806,7 @@
         </p:nvSpPr>
         <p:spPr>
           <a:xfrm>
-            <a:off x="1677600" y="4482000"/>
+            <a:off x="1677600" y="4860000"/>
             <a:ext cx="1944000" cy="468000"/>
           </a:xfrm>
           <a:prstGeom prst="roundRect">
@@ -3759,7 +3867,7 @@
         </p:nvSpPr>
         <p:spPr>
           <a:xfrm>
-            <a:off x="3693600" y="4482000"/>
+            <a:off x="3693600" y="4860000"/>
             <a:ext cx="1944000" cy="468000"/>
           </a:xfrm>
           <a:prstGeom prst="roundRect">
@@ -3820,7 +3928,7 @@
         </p:nvSpPr>
         <p:spPr>
           <a:xfrm>
-            <a:off x="5709600" y="4482000"/>
+            <a:off x="5709600" y="4860000"/>
             <a:ext cx="3668400" cy="468000"/>
           </a:xfrm>
           <a:prstGeom prst="rect">
@@ -3871,7 +3979,7 @@
         </p:nvSpPr>
         <p:spPr>
           <a:xfrm>
-            <a:off x="525600" y="5076000"/>
+            <a:off x="525600" y="5400000"/>
             <a:ext cx="8852400" cy="468000"/>
           </a:xfrm>
           <a:prstGeom prst="roundRect">
@@ -3932,7 +4040,7 @@
         </p:nvSpPr>
         <p:spPr>
           <a:xfrm>
-            <a:off x="525600" y="5616000"/>
+            <a:off x="525600" y="5903999"/>
             <a:ext cx="8852400" cy="288000"/>
           </a:xfrm>
           <a:prstGeom prst="rect">
@@ -3965,6 +4073,150 @@
           </a:p>
         </p:txBody>
       </p:sp>
+      <p:pic>
+        <p:nvPicPr>
+          <p:cNvPr id="24" name="Picture 23" descr="thanks_icon_beauty.png"/>
+          <p:cNvPicPr>
+            <a:picLocks noChangeAspect="1"/>
+          </p:cNvPicPr>
+          <p:nvPr/>
+        </p:nvPicPr>
+        <p:blipFill>
+          <a:blip r:embed="rId2"/>
+          <a:stretch>
+            <a:fillRect/>
+          </a:stretch>
+        </p:blipFill>
+        <p:spPr>
+          <a:xfrm>
+            <a:off x="615600" y="2178000"/>
+            <a:ext cx="827999" cy="827999"/>
+          </a:xfrm>
+          <a:prstGeom prst="rect">
+            <a:avLst/>
+          </a:prstGeom>
+        </p:spPr>
+      </p:pic>
+      <p:pic>
+        <p:nvPicPr>
+          <p:cNvPr id="25" name="Picture 24" descr="thanks_icon_hoken.png"/>
+          <p:cNvPicPr>
+            <a:picLocks noChangeAspect="1"/>
+          </p:cNvPicPr>
+          <p:nvPr/>
+        </p:nvPicPr>
+        <p:blipFill>
+          <a:blip r:embed="rId3"/>
+          <a:stretch>
+            <a:fillRect/>
+          </a:stretch>
+        </p:blipFill>
+        <p:spPr>
+          <a:xfrm>
+            <a:off x="3614399" y="2178000"/>
+            <a:ext cx="827999" cy="827999"/>
+          </a:xfrm>
+          <a:prstGeom prst="rect">
+            <a:avLst/>
+          </a:prstGeom>
+        </p:spPr>
+      </p:pic>
+      <p:pic>
+        <p:nvPicPr>
+          <p:cNvPr id="26" name="Picture 25" descr="thanks_icon_bus.png"/>
+          <p:cNvPicPr>
+            <a:picLocks noChangeAspect="1"/>
+          </p:cNvPicPr>
+          <p:nvPr/>
+        </p:nvPicPr>
+        <p:blipFill>
+          <a:blip r:embed="rId4"/>
+          <a:stretch>
+            <a:fillRect/>
+          </a:stretch>
+        </p:blipFill>
+        <p:spPr>
+          <a:xfrm>
+            <a:off x="6613200" y="2178000"/>
+            <a:ext cx="827999" cy="827999"/>
+          </a:xfrm>
+          <a:prstGeom prst="rect">
+            <a:avLst/>
+          </a:prstGeom>
+        </p:spPr>
+      </p:pic>
+      <p:pic>
+        <p:nvPicPr>
+          <p:cNvPr id="27" name="Picture 26" descr="thanks_icon_hifuka.png"/>
+          <p:cNvPicPr>
+            <a:picLocks noChangeAspect="1"/>
+          </p:cNvPicPr>
+          <p:nvPr/>
+        </p:nvPicPr>
+        <p:blipFill>
+          <a:blip r:embed="rId5"/>
+          <a:stretch>
+            <a:fillRect/>
+          </a:stretch>
+        </p:blipFill>
+        <p:spPr>
+          <a:xfrm>
+            <a:off x="615600" y="3761999"/>
+            <a:ext cx="827999" cy="827999"/>
+          </a:xfrm>
+          <a:prstGeom prst="rect">
+            <a:avLst/>
+          </a:prstGeom>
+        </p:spPr>
+      </p:pic>
+      <p:pic>
+        <p:nvPicPr>
+          <p:cNvPr id="28" name="Picture 27" descr="thanks_icon_shushoku.png"/>
+          <p:cNvPicPr>
+            <a:picLocks noChangeAspect="1"/>
+          </p:cNvPicPr>
+          <p:nvPr/>
+        </p:nvPicPr>
+        <p:blipFill>
+          <a:blip r:embed="rId6"/>
+          <a:stretch>
+            <a:fillRect/>
+          </a:stretch>
+        </p:blipFill>
+        <p:spPr>
+          <a:xfrm>
+            <a:off x="3614399" y="3761999"/>
+            <a:ext cx="827999" cy="827999"/>
+          </a:xfrm>
+          <a:prstGeom prst="rect">
+            <a:avLst/>
+          </a:prstGeom>
+        </p:spPr>
+      </p:pic>
+      <p:pic>
+        <p:nvPicPr>
+          <p:cNvPr id="29" name="Picture 28" descr="thanks_icon_cafe.png"/>
+          <p:cNvPicPr>
+            <a:picLocks noChangeAspect="1"/>
+          </p:cNvPicPr>
+          <p:nvPr/>
+        </p:nvPicPr>
+        <p:blipFill>
+          <a:blip r:embed="rId7"/>
+          <a:stretch>
+            <a:fillRect/>
+          </a:stretch>
+        </p:blipFill>
+        <p:spPr>
+          <a:xfrm>
+            <a:off x="6613200" y="3761999"/>
+            <a:ext cx="827999" cy="827999"/>
+          </a:xfrm>
+          <a:prstGeom prst="rect">
+            <a:avLst/>
+          </a:prstGeom>
+        </p:spPr>
+      </p:pic>
     </p:spTree>
     <p:extLst>
       <p:ext uri="{BB962C8B-B14F-4D97-AF65-F5344CB8AC3E}">

--- a/20261001_サンクスLINEの費用と実績.pptx
+++ b/20261001_サンクスLINEの費用と実績.pptx
@@ -2688,7 +2688,7 @@
                 <a:ea typeface="メイリオ"/>
                 <a:cs typeface="メイリオ"/>
               </a:rPr>
-              <a:t>実績と費用｜LINEで追うと、来店・面談が伸びる</a:t>
+              <a:t>実績と費用</a:t>
             </a:r>
           </a:p>
         </p:txBody>
@@ -2779,1208 +2779,14 @@
       </p:cxnSp>
       <p:sp>
         <p:nvSpPr>
-          <p:cNvPr id="6" name="Rounded Rectangle 8"/>
-          <p:cNvSpPr/>
-          <p:nvPr/>
-        </p:nvSpPr>
-        <p:spPr>
-          <a:xfrm>
-            <a:off x="525600" y="1638000"/>
-            <a:ext cx="2854800" cy="324000"/>
-          </a:xfrm>
-          <a:prstGeom prst="roundRect">
-            <a:avLst>
-              <a:gd name="adj" fmla="val 10000"/>
-            </a:avLst>
-          </a:prstGeom>
-          <a:solidFill>
-            <a:srgbClr val="06C755"/>
-          </a:solidFill>
-          <a:ln>
-            <a:noFill/>
-          </a:ln>
-          <a:effectLst/>
-        </p:spPr>
-        <p:style>
-          <a:lnRef idx="1">
-            <a:schemeClr val="accent1"/>
-          </a:lnRef>
-          <a:fillRef idx="3">
-            <a:schemeClr val="accent1"/>
-          </a:fillRef>
-          <a:effectRef idx="2">
-            <a:schemeClr val="accent1"/>
-          </a:effectRef>
-          <a:fontRef idx="minor">
-            <a:schemeClr val="lt1"/>
-          </a:fontRef>
-        </p:style>
-        <p:txBody>
-          <a:bodyPr wrap="square" lIns="54000" tIns="18000" rIns="54000" bIns="18000" rtlCol="0" anchor="ctr"/>
-          <a:lstStyle/>
-          <a:p>
-            <a:pPr algn="ctr">
-              <a:lnSpc>
-                <a:spcPct val="120000"/>
-              </a:lnSpc>
-            </a:pPr>
-            <a:r>
-              <a:rPr sz="1400" b="1">
-                <a:solidFill>
-                  <a:srgbClr val="FFFFFF"/>
-                </a:solidFill>
-                <a:latin typeface="メイリオ"/>
-                <a:ea typeface="メイリオ"/>
-                <a:cs typeface="メイリオ"/>
-              </a:rPr>
-              <a:t>弊社実績｜美容クリニック</a:t>
-            </a:r>
-          </a:p>
-        </p:txBody>
-      </p:sp>
-      <p:sp>
-        <p:nvSpPr>
-          <p:cNvPr id="7" name="Rounded Rectangle 6"/>
-          <p:cNvSpPr/>
-          <p:nvPr/>
-        </p:nvSpPr>
-        <p:spPr>
-          <a:xfrm>
-            <a:off x="525600" y="1998000"/>
-            <a:ext cx="2854800" cy="1188000"/>
-          </a:xfrm>
-          <a:prstGeom prst="roundRect">
-            <a:avLst>
-              <a:gd name="adj" fmla="val 10000"/>
-            </a:avLst>
-          </a:prstGeom>
-          <a:solidFill>
-            <a:srgbClr val="F4F7FF"/>
-          </a:solidFill>
-          <a:ln w="12700">
-            <a:solidFill>
-              <a:srgbClr val="D9D9D9"/>
-            </a:solidFill>
-          </a:ln>
-          <a:effectLst/>
-        </p:spPr>
-        <p:style>
-          <a:lnRef idx="1">
-            <a:schemeClr val="accent1"/>
-          </a:lnRef>
-          <a:fillRef idx="3">
-            <a:schemeClr val="accent1"/>
-          </a:fillRef>
-          <a:effectRef idx="2">
-            <a:schemeClr val="accent1"/>
-          </a:effectRef>
-          <a:fontRef idx="minor">
-            <a:schemeClr val="lt1"/>
-          </a:fontRef>
-        </p:style>
-        <p:txBody>
-          <a:bodyPr wrap="square" lIns="954000" tIns="18000" rIns="54000" bIns="18000" rtlCol="0" anchor="ctr"/>
-          <a:lstStyle/>
-          <a:p>
-            <a:pPr algn="ctr">
-              <a:lnSpc>
-                <a:spcPct val="120000"/>
-              </a:lnSpc>
-            </a:pPr>
-            <a:r>
-              <a:rPr sz="1000" b="0">
-                <a:solidFill>
-                  <a:srgbClr val="333333"/>
-                </a:solidFill>
-                <a:latin typeface="メイリオ"/>
-                <a:ea typeface="メイリオ"/>
-                <a:cs typeface="メイリオ"/>
-              </a:rPr>
-              <a:t>完了画面からLINEへ</a:t>
-            </a:r>
-          </a:p>
-          <a:p>
-            <a:pPr algn="ctr">
-              <a:lnSpc>
-                <a:spcPct val="120000"/>
-              </a:lnSpc>
-            </a:pPr>
-            <a:r>
-              <a:rPr sz="1700" b="1">
-                <a:solidFill>
-                  <a:srgbClr val="1F285A"/>
-                </a:solidFill>
-                <a:latin typeface="メイリオ"/>
-                <a:ea typeface="メイリオ"/>
-                <a:cs typeface="メイリオ"/>
-              </a:rPr>
-              <a:t>来院率</a:t>
-            </a:r>
-          </a:p>
-          <a:p>
-            <a:pPr algn="ctr">
-              <a:lnSpc>
-                <a:spcPct val="120000"/>
-              </a:lnSpc>
-            </a:pPr>
-            <a:r>
-              <a:rPr sz="1700" b="1">
-                <a:solidFill>
-                  <a:srgbClr val="1F285A"/>
-                </a:solidFill>
-                <a:latin typeface="メイリオ"/>
-                <a:ea typeface="メイリオ"/>
-                <a:cs typeface="メイリオ"/>
-              </a:rPr>
-              <a:t>40〜50%改善</a:t>
-            </a:r>
-          </a:p>
-        </p:txBody>
-      </p:sp>
-      <p:sp>
-        <p:nvSpPr>
-          <p:cNvPr id="8" name="Rounded Rectangle 4"/>
-          <p:cNvSpPr/>
-          <p:nvPr/>
-        </p:nvSpPr>
-        <p:spPr>
-          <a:xfrm>
-            <a:off x="3524399" y="1638000"/>
-            <a:ext cx="2854800" cy="324000"/>
-          </a:xfrm>
-          <a:prstGeom prst="roundRect">
-            <a:avLst>
-              <a:gd name="adj" fmla="val 10000"/>
-            </a:avLst>
-          </a:prstGeom>
-          <a:solidFill>
-            <a:srgbClr val="1F285A"/>
-          </a:solidFill>
-          <a:ln>
-            <a:noFill/>
-          </a:ln>
-          <a:effectLst/>
-        </p:spPr>
-        <p:style>
-          <a:lnRef idx="1">
-            <a:schemeClr val="accent1"/>
-          </a:lnRef>
-          <a:fillRef idx="3">
-            <a:schemeClr val="accent1"/>
-          </a:fillRef>
-          <a:effectRef idx="2">
-            <a:schemeClr val="accent1"/>
-          </a:effectRef>
-          <a:fontRef idx="minor">
-            <a:schemeClr val="lt1"/>
-          </a:fontRef>
-        </p:style>
-        <p:txBody>
-          <a:bodyPr wrap="square" lIns="54000" tIns="18000" rIns="54000" bIns="18000" rtlCol="0" anchor="ctr"/>
-          <a:lstStyle/>
-          <a:p>
-            <a:pPr algn="ctr">
-              <a:lnSpc>
-                <a:spcPct val="120000"/>
-              </a:lnSpc>
-            </a:pPr>
-            <a:r>
-              <a:rPr sz="1400" b="1">
-                <a:solidFill>
-                  <a:srgbClr val="FFFFFF"/>
-                </a:solidFill>
-                <a:latin typeface="メイリオ"/>
-                <a:ea typeface="メイリオ"/>
-                <a:cs typeface="メイリオ"/>
-              </a:rPr>
-              <a:t>保険見直し本舗</a:t>
-            </a:r>
-          </a:p>
-        </p:txBody>
-      </p:sp>
-      <p:sp>
-        <p:nvSpPr>
-          <p:cNvPr id="9" name="Rounded Rectangle 6"/>
-          <p:cNvSpPr/>
-          <p:nvPr/>
-        </p:nvSpPr>
-        <p:spPr>
-          <a:xfrm>
-            <a:off x="3524399" y="1998000"/>
-            <a:ext cx="2854800" cy="1188000"/>
-          </a:xfrm>
-          <a:prstGeom prst="roundRect">
-            <a:avLst>
-              <a:gd name="adj" fmla="val 10000"/>
-            </a:avLst>
-          </a:prstGeom>
-          <a:solidFill>
-            <a:srgbClr val="F4F7FF"/>
-          </a:solidFill>
-          <a:ln w="12700">
-            <a:solidFill>
-              <a:srgbClr val="D9D9D9"/>
-            </a:solidFill>
-          </a:ln>
-          <a:effectLst/>
-        </p:spPr>
-        <p:style>
-          <a:lnRef idx="1">
-            <a:schemeClr val="accent1"/>
-          </a:lnRef>
-          <a:fillRef idx="3">
-            <a:schemeClr val="accent1"/>
-          </a:fillRef>
-          <a:effectRef idx="2">
-            <a:schemeClr val="accent1"/>
-          </a:effectRef>
-          <a:fontRef idx="minor">
-            <a:schemeClr val="lt1"/>
-          </a:fontRef>
-        </p:style>
-        <p:txBody>
-          <a:bodyPr wrap="square" lIns="954000" tIns="18000" rIns="54000" bIns="18000" rtlCol="0" anchor="ctr"/>
-          <a:lstStyle/>
-          <a:p>
-            <a:pPr algn="ctr">
-              <a:lnSpc>
-                <a:spcPct val="120000"/>
-              </a:lnSpc>
-            </a:pPr>
-            <a:r>
-              <a:rPr sz="1000" b="0">
-                <a:solidFill>
-                  <a:srgbClr val="333333"/>
-                </a:solidFill>
-                <a:latin typeface="メイリオ"/>
-                <a:ea typeface="メイリオ"/>
-                <a:cs typeface="メイリオ"/>
-              </a:rPr>
-              <a:t>予約日時をLINEでリマインド</a:t>
-            </a:r>
-          </a:p>
-          <a:p>
-            <a:pPr algn="ctr">
-              <a:lnSpc>
-                <a:spcPct val="120000"/>
-              </a:lnSpc>
-            </a:pPr>
-            <a:r>
-              <a:rPr sz="1700" b="1">
-                <a:solidFill>
-                  <a:srgbClr val="1F285A"/>
-                </a:solidFill>
-                <a:latin typeface="メイリオ"/>
-                <a:ea typeface="メイリオ"/>
-                <a:cs typeface="メイリオ"/>
-              </a:rPr>
-              <a:t>面談実施率</a:t>
-            </a:r>
-          </a:p>
-          <a:p>
-            <a:pPr algn="ctr">
-              <a:lnSpc>
-                <a:spcPct val="120000"/>
-              </a:lnSpc>
-            </a:pPr>
-            <a:r>
-              <a:rPr sz="1700" b="1">
-                <a:solidFill>
-                  <a:srgbClr val="1F285A"/>
-                </a:solidFill>
-                <a:latin typeface="メイリオ"/>
-                <a:ea typeface="メイリオ"/>
-                <a:cs typeface="メイリオ"/>
-              </a:rPr>
-              <a:t>＋5ポイント</a:t>
-            </a:r>
-          </a:p>
-        </p:txBody>
-      </p:sp>
-      <p:sp>
-        <p:nvSpPr>
-          <p:cNvPr id="10" name="Rounded Rectangle 4"/>
-          <p:cNvSpPr/>
-          <p:nvPr/>
-        </p:nvSpPr>
-        <p:spPr>
-          <a:xfrm>
-            <a:off x="6523200" y="1638000"/>
-            <a:ext cx="2854800" cy="324000"/>
-          </a:xfrm>
-          <a:prstGeom prst="roundRect">
-            <a:avLst>
-              <a:gd name="adj" fmla="val 10000"/>
-            </a:avLst>
-          </a:prstGeom>
-          <a:solidFill>
-            <a:srgbClr val="1F285A"/>
-          </a:solidFill>
-          <a:ln>
-            <a:noFill/>
-          </a:ln>
-          <a:effectLst/>
-        </p:spPr>
-        <p:style>
-          <a:lnRef idx="1">
-            <a:schemeClr val="accent1"/>
-          </a:lnRef>
-          <a:fillRef idx="3">
-            <a:schemeClr val="accent1"/>
-          </a:fillRef>
-          <a:effectRef idx="2">
-            <a:schemeClr val="accent1"/>
-          </a:effectRef>
-          <a:fontRef idx="minor">
-            <a:schemeClr val="lt1"/>
-          </a:fontRef>
-        </p:style>
-        <p:txBody>
-          <a:bodyPr wrap="square" lIns="54000" tIns="18000" rIns="54000" bIns="18000" rtlCol="0" anchor="ctr"/>
-          <a:lstStyle/>
-          <a:p>
-            <a:pPr algn="ctr">
-              <a:lnSpc>
-                <a:spcPct val="120000"/>
-              </a:lnSpc>
-            </a:pPr>
-            <a:r>
-              <a:rPr sz="1400" b="1">
-                <a:solidFill>
-                  <a:srgbClr val="FFFFFF"/>
-                </a:solidFill>
-                <a:latin typeface="メイリオ"/>
-                <a:ea typeface="メイリオ"/>
-                <a:cs typeface="メイリオ"/>
-              </a:rPr>
-              <a:t>琴平バス（観光バス）</a:t>
-            </a:r>
-          </a:p>
-        </p:txBody>
-      </p:sp>
-      <p:sp>
-        <p:nvSpPr>
-          <p:cNvPr id="11" name="Rounded Rectangle 6"/>
-          <p:cNvSpPr/>
-          <p:nvPr/>
-        </p:nvSpPr>
-        <p:spPr>
-          <a:xfrm>
-            <a:off x="6523200" y="1998000"/>
-            <a:ext cx="2854800" cy="1188000"/>
-          </a:xfrm>
-          <a:prstGeom prst="roundRect">
-            <a:avLst>
-              <a:gd name="adj" fmla="val 10000"/>
-            </a:avLst>
-          </a:prstGeom>
-          <a:solidFill>
-            <a:srgbClr val="F4F7FF"/>
-          </a:solidFill>
-          <a:ln w="12700">
-            <a:solidFill>
-              <a:srgbClr val="D9D9D9"/>
-            </a:solidFill>
-          </a:ln>
-          <a:effectLst/>
-        </p:spPr>
-        <p:style>
-          <a:lnRef idx="1">
-            <a:schemeClr val="accent1"/>
-          </a:lnRef>
-          <a:fillRef idx="3">
-            <a:schemeClr val="accent1"/>
-          </a:fillRef>
-          <a:effectRef idx="2">
-            <a:schemeClr val="accent1"/>
-          </a:effectRef>
-          <a:fontRef idx="minor">
-            <a:schemeClr val="lt1"/>
-          </a:fontRef>
-        </p:style>
-        <p:txBody>
-          <a:bodyPr wrap="square" lIns="954000" tIns="18000" rIns="54000" bIns="18000" rtlCol="0" anchor="ctr"/>
-          <a:lstStyle/>
-          <a:p>
-            <a:pPr algn="ctr">
-              <a:lnSpc>
-                <a:spcPct val="120000"/>
-              </a:lnSpc>
-            </a:pPr>
-            <a:r>
-              <a:rPr sz="1000" b="0">
-                <a:solidFill>
-                  <a:srgbClr val="333333"/>
-                </a:solidFill>
-                <a:latin typeface="メイリオ"/>
-                <a:ea typeface="メイリオ"/>
-                <a:cs typeface="メイリオ"/>
-              </a:rPr>
-              <a:t>予約の通知をLINEで受け取った方のうち</a:t>
-            </a:r>
-          </a:p>
-          <a:p>
-            <a:pPr algn="ctr">
-              <a:lnSpc>
-                <a:spcPct val="120000"/>
-              </a:lnSpc>
-            </a:pPr>
-            <a:r>
-              <a:rPr sz="1700" b="1">
-                <a:solidFill>
-                  <a:srgbClr val="1F285A"/>
-                </a:solidFill>
-                <a:latin typeface="メイリオ"/>
-                <a:ea typeface="メイリオ"/>
-                <a:cs typeface="メイリオ"/>
-              </a:rPr>
-              <a:t>友だち追加</a:t>
-            </a:r>
-          </a:p>
-          <a:p>
-            <a:pPr algn="ctr">
-              <a:lnSpc>
-                <a:spcPct val="120000"/>
-              </a:lnSpc>
-            </a:pPr>
-            <a:r>
-              <a:rPr sz="1700" b="1">
-                <a:solidFill>
-                  <a:srgbClr val="1F285A"/>
-                </a:solidFill>
-                <a:latin typeface="メイリオ"/>
-                <a:ea typeface="メイリオ"/>
-                <a:cs typeface="メイリオ"/>
-              </a:rPr>
-              <a:t>約70%</a:t>
-            </a:r>
-          </a:p>
-        </p:txBody>
-      </p:sp>
-      <p:sp>
-        <p:nvSpPr>
-          <p:cNvPr id="12" name="Rounded Rectangle 4"/>
-          <p:cNvSpPr/>
-          <p:nvPr/>
-        </p:nvSpPr>
-        <p:spPr>
-          <a:xfrm>
-            <a:off x="525600" y="3221999"/>
-            <a:ext cx="2854800" cy="324000"/>
-          </a:xfrm>
-          <a:prstGeom prst="roundRect">
-            <a:avLst>
-              <a:gd name="adj" fmla="val 10000"/>
-            </a:avLst>
-          </a:prstGeom>
-          <a:solidFill>
-            <a:srgbClr val="1F285A"/>
-          </a:solidFill>
-          <a:ln>
-            <a:noFill/>
-          </a:ln>
-          <a:effectLst/>
-        </p:spPr>
-        <p:style>
-          <a:lnRef idx="1">
-            <a:schemeClr val="accent1"/>
-          </a:lnRef>
-          <a:fillRef idx="3">
-            <a:schemeClr val="accent1"/>
-          </a:fillRef>
-          <a:effectRef idx="2">
-            <a:schemeClr val="accent1"/>
-          </a:effectRef>
-          <a:fontRef idx="minor">
-            <a:schemeClr val="lt1"/>
-          </a:fontRef>
-        </p:style>
-        <p:txBody>
-          <a:bodyPr wrap="square" lIns="54000" tIns="18000" rIns="54000" bIns="18000" rtlCol="0" anchor="ctr"/>
-          <a:lstStyle/>
-          <a:p>
-            <a:pPr algn="ctr">
-              <a:lnSpc>
-                <a:spcPct val="120000"/>
-              </a:lnSpc>
-            </a:pPr>
-            <a:r>
-              <a:rPr sz="1400" b="1">
-                <a:solidFill>
-                  <a:srgbClr val="FFFFFF"/>
-                </a:solidFill>
-                <a:latin typeface="メイリオ"/>
-                <a:ea typeface="メイリオ"/>
-                <a:cs typeface="メイリオ"/>
-              </a:rPr>
-              <a:t>皮膚科クリニック</a:t>
-            </a:r>
-          </a:p>
-        </p:txBody>
-      </p:sp>
-      <p:sp>
-        <p:nvSpPr>
-          <p:cNvPr id="13" name="Rounded Rectangle 6"/>
-          <p:cNvSpPr/>
-          <p:nvPr/>
-        </p:nvSpPr>
-        <p:spPr>
-          <a:xfrm>
-            <a:off x="525600" y="3581999"/>
-            <a:ext cx="2854800" cy="1188000"/>
-          </a:xfrm>
-          <a:prstGeom prst="roundRect">
-            <a:avLst>
-              <a:gd name="adj" fmla="val 10000"/>
-            </a:avLst>
-          </a:prstGeom>
-          <a:solidFill>
-            <a:srgbClr val="F4F7FF"/>
-          </a:solidFill>
-          <a:ln w="12700">
-            <a:solidFill>
-              <a:srgbClr val="D9D9D9"/>
-            </a:solidFill>
-          </a:ln>
-          <a:effectLst/>
-        </p:spPr>
-        <p:style>
-          <a:lnRef idx="1">
-            <a:schemeClr val="accent1"/>
-          </a:lnRef>
-          <a:fillRef idx="3">
-            <a:schemeClr val="accent1"/>
-          </a:fillRef>
-          <a:effectRef idx="2">
-            <a:schemeClr val="accent1"/>
-          </a:effectRef>
-          <a:fontRef idx="minor">
-            <a:schemeClr val="lt1"/>
-          </a:fontRef>
-        </p:style>
-        <p:txBody>
-          <a:bodyPr wrap="square" lIns="954000" tIns="18000" rIns="54000" bIns="18000" rtlCol="0" anchor="ctr"/>
-          <a:lstStyle/>
-          <a:p>
-            <a:pPr algn="ctr">
-              <a:lnSpc>
-                <a:spcPct val="120000"/>
-              </a:lnSpc>
-            </a:pPr>
-            <a:r>
-              <a:rPr sz="1000" b="0">
-                <a:solidFill>
-                  <a:srgbClr val="333333"/>
-                </a:solidFill>
-                <a:latin typeface="メイリオ"/>
-                <a:ea typeface="メイリオ"/>
-                <a:cs typeface="メイリオ"/>
-              </a:rPr>
-              <a:t>友だち追加後のステップ配信</a:t>
-            </a:r>
-          </a:p>
-          <a:p>
-            <a:pPr algn="ctr">
-              <a:lnSpc>
-                <a:spcPct val="120000"/>
-              </a:lnSpc>
-            </a:pPr>
-            <a:r>
-              <a:rPr sz="1700" b="1">
-                <a:solidFill>
-                  <a:srgbClr val="1F285A"/>
-                </a:solidFill>
-                <a:latin typeface="メイリオ"/>
-                <a:ea typeface="メイリオ"/>
-                <a:cs typeface="メイリオ"/>
-              </a:rPr>
-              <a:t>予約数</a:t>
-            </a:r>
-          </a:p>
-          <a:p>
-            <a:pPr algn="ctr">
-              <a:lnSpc>
-                <a:spcPct val="120000"/>
-              </a:lnSpc>
-            </a:pPr>
-            <a:r>
-              <a:rPr sz="1700" b="1">
-                <a:solidFill>
-                  <a:srgbClr val="1F285A"/>
-                </a:solidFill>
-                <a:latin typeface="メイリオ"/>
-                <a:ea typeface="メイリオ"/>
-                <a:cs typeface="メイリオ"/>
-              </a:rPr>
-              <a:t>約120%</a:t>
-            </a:r>
-          </a:p>
-        </p:txBody>
-      </p:sp>
-      <p:sp>
-        <p:nvSpPr>
-          <p:cNvPr id="14" name="Rounded Rectangle 4"/>
-          <p:cNvSpPr/>
-          <p:nvPr/>
-        </p:nvSpPr>
-        <p:spPr>
-          <a:xfrm>
-            <a:off x="3524399" y="3221999"/>
-            <a:ext cx="2854800" cy="324000"/>
-          </a:xfrm>
-          <a:prstGeom prst="roundRect">
-            <a:avLst>
-              <a:gd name="adj" fmla="val 10000"/>
-            </a:avLst>
-          </a:prstGeom>
-          <a:solidFill>
-            <a:srgbClr val="1F285A"/>
-          </a:solidFill>
-          <a:ln>
-            <a:noFill/>
-          </a:ln>
-          <a:effectLst/>
-        </p:spPr>
-        <p:style>
-          <a:lnRef idx="1">
-            <a:schemeClr val="accent1"/>
-          </a:lnRef>
-          <a:fillRef idx="3">
-            <a:schemeClr val="accent1"/>
-          </a:fillRef>
-          <a:effectRef idx="2">
-            <a:schemeClr val="accent1"/>
-          </a:effectRef>
-          <a:fontRef idx="minor">
-            <a:schemeClr val="lt1"/>
-          </a:fontRef>
-        </p:style>
-        <p:txBody>
-          <a:bodyPr wrap="square" lIns="54000" tIns="18000" rIns="54000" bIns="18000" rtlCol="0" anchor="ctr"/>
-          <a:lstStyle/>
-          <a:p>
-            <a:pPr algn="ctr">
-              <a:lnSpc>
-                <a:spcPct val="120000"/>
-              </a:lnSpc>
-            </a:pPr>
-            <a:r>
-              <a:rPr sz="1400" b="1">
-                <a:solidFill>
-                  <a:srgbClr val="FFFFFF"/>
-                </a:solidFill>
-                <a:latin typeface="メイリオ"/>
-                <a:ea typeface="メイリオ"/>
-                <a:cs typeface="メイリオ"/>
-              </a:rPr>
-              <a:t>UZUZ（就職支援）</a:t>
-            </a:r>
-          </a:p>
-        </p:txBody>
-      </p:sp>
-      <p:sp>
-        <p:nvSpPr>
-          <p:cNvPr id="15" name="Rounded Rectangle 6"/>
-          <p:cNvSpPr/>
-          <p:nvPr/>
-        </p:nvSpPr>
-        <p:spPr>
-          <a:xfrm>
-            <a:off x="3524399" y="3581999"/>
-            <a:ext cx="2854800" cy="1188000"/>
-          </a:xfrm>
-          <a:prstGeom prst="roundRect">
-            <a:avLst>
-              <a:gd name="adj" fmla="val 10000"/>
-            </a:avLst>
-          </a:prstGeom>
-          <a:solidFill>
-            <a:srgbClr val="F4F7FF"/>
-          </a:solidFill>
-          <a:ln w="12700">
-            <a:solidFill>
-              <a:srgbClr val="D9D9D9"/>
-            </a:solidFill>
-          </a:ln>
-          <a:effectLst/>
-        </p:spPr>
-        <p:style>
-          <a:lnRef idx="1">
-            <a:schemeClr val="accent1"/>
-          </a:lnRef>
-          <a:fillRef idx="3">
-            <a:schemeClr val="accent1"/>
-          </a:fillRef>
-          <a:effectRef idx="2">
-            <a:schemeClr val="accent1"/>
-          </a:effectRef>
-          <a:fontRef idx="minor">
-            <a:schemeClr val="lt1"/>
-          </a:fontRef>
-        </p:style>
-        <p:txBody>
-          <a:bodyPr wrap="square" lIns="954000" tIns="18000" rIns="54000" bIns="18000" rtlCol="0" anchor="ctr"/>
-          <a:lstStyle/>
-          <a:p>
-            <a:pPr algn="ctr">
-              <a:lnSpc>
-                <a:spcPct val="120000"/>
-              </a:lnSpc>
-            </a:pPr>
-            <a:r>
-              <a:rPr sz="1000" b="0">
-                <a:solidFill>
-                  <a:srgbClr val="333333"/>
-                </a:solidFill>
-                <a:latin typeface="メイリオ"/>
-                <a:ea typeface="メイリオ"/>
-                <a:cs typeface="メイリオ"/>
-              </a:rPr>
-              <a:t>LINEからの問い合わせ</a:t>
-            </a:r>
-          </a:p>
-          <a:p>
-            <a:pPr algn="ctr">
-              <a:lnSpc>
-                <a:spcPct val="120000"/>
-              </a:lnSpc>
-            </a:pPr>
-            <a:r>
-              <a:rPr sz="1700" b="1">
-                <a:solidFill>
-                  <a:srgbClr val="1F285A"/>
-                </a:solidFill>
-                <a:latin typeface="メイリオ"/>
-                <a:ea typeface="メイリオ"/>
-                <a:cs typeface="メイリオ"/>
-              </a:rPr>
-              <a:t>面談予約率</a:t>
-            </a:r>
-          </a:p>
-          <a:p>
-            <a:pPr algn="ctr">
-              <a:lnSpc>
-                <a:spcPct val="120000"/>
-              </a:lnSpc>
-            </a:pPr>
-            <a:r>
-              <a:rPr sz="1700" b="1">
-                <a:solidFill>
-                  <a:srgbClr val="1F285A"/>
-                </a:solidFill>
-                <a:latin typeface="メイリオ"/>
-                <a:ea typeface="メイリオ"/>
-                <a:cs typeface="メイリオ"/>
-              </a:rPr>
-              <a:t>55%</a:t>
-            </a:r>
-          </a:p>
-        </p:txBody>
-      </p:sp>
-      <p:sp>
-        <p:nvSpPr>
-          <p:cNvPr id="16" name="Rounded Rectangle 4"/>
-          <p:cNvSpPr/>
-          <p:nvPr/>
-        </p:nvSpPr>
-        <p:spPr>
-          <a:xfrm>
-            <a:off x="6523200" y="3221999"/>
-            <a:ext cx="2854800" cy="324000"/>
-          </a:xfrm>
-          <a:prstGeom prst="roundRect">
-            <a:avLst>
-              <a:gd name="adj" fmla="val 10000"/>
-            </a:avLst>
-          </a:prstGeom>
-          <a:solidFill>
-            <a:srgbClr val="1F285A"/>
-          </a:solidFill>
-          <a:ln>
-            <a:noFill/>
-          </a:ln>
-          <a:effectLst/>
-        </p:spPr>
-        <p:style>
-          <a:lnRef idx="1">
-            <a:schemeClr val="accent1"/>
-          </a:lnRef>
-          <a:fillRef idx="3">
-            <a:schemeClr val="accent1"/>
-          </a:fillRef>
-          <a:effectRef idx="2">
-            <a:schemeClr val="accent1"/>
-          </a:effectRef>
-          <a:fontRef idx="minor">
-            <a:schemeClr val="lt1"/>
-          </a:fontRef>
-        </p:style>
-        <p:txBody>
-          <a:bodyPr wrap="square" lIns="54000" tIns="18000" rIns="54000" bIns="18000" rtlCol="0" anchor="ctr"/>
-          <a:lstStyle/>
-          <a:p>
-            <a:pPr algn="ctr">
-              <a:lnSpc>
-                <a:spcPct val="120000"/>
-              </a:lnSpc>
-            </a:pPr>
-            <a:r>
-              <a:rPr sz="1400" b="1">
-                <a:solidFill>
-                  <a:srgbClr val="FFFFFF"/>
-                </a:solidFill>
-                <a:latin typeface="メイリオ"/>
-                <a:ea typeface="メイリオ"/>
-                <a:cs typeface="メイリオ"/>
-              </a:rPr>
-              <a:t>サンマルクカフェ</a:t>
-            </a:r>
-          </a:p>
-        </p:txBody>
-      </p:sp>
-      <p:sp>
-        <p:nvSpPr>
-          <p:cNvPr id="17" name="Rounded Rectangle 6"/>
-          <p:cNvSpPr/>
-          <p:nvPr/>
-        </p:nvSpPr>
-        <p:spPr>
-          <a:xfrm>
-            <a:off x="6523200" y="3581999"/>
-            <a:ext cx="2854800" cy="1188000"/>
-          </a:xfrm>
-          <a:prstGeom prst="roundRect">
-            <a:avLst>
-              <a:gd name="adj" fmla="val 10000"/>
-            </a:avLst>
-          </a:prstGeom>
-          <a:solidFill>
-            <a:srgbClr val="F4F7FF"/>
-          </a:solidFill>
-          <a:ln w="12700">
-            <a:solidFill>
-              <a:srgbClr val="D9D9D9"/>
-            </a:solidFill>
-          </a:ln>
-          <a:effectLst/>
-        </p:spPr>
-        <p:style>
-          <a:lnRef idx="1">
-            <a:schemeClr val="accent1"/>
-          </a:lnRef>
-          <a:fillRef idx="3">
-            <a:schemeClr val="accent1"/>
-          </a:fillRef>
-          <a:effectRef idx="2">
-            <a:schemeClr val="accent1"/>
-          </a:effectRef>
-          <a:fontRef idx="minor">
-            <a:schemeClr val="lt1"/>
-          </a:fontRef>
-        </p:style>
-        <p:txBody>
-          <a:bodyPr wrap="square" lIns="954000" tIns="18000" rIns="54000" bIns="18000" rtlCol="0" anchor="ctr"/>
-          <a:lstStyle/>
-          <a:p>
-            <a:pPr algn="ctr">
-              <a:lnSpc>
-                <a:spcPct val="120000"/>
-              </a:lnSpc>
-            </a:pPr>
-            <a:r>
-              <a:rPr sz="1000" b="0">
-                <a:solidFill>
-                  <a:srgbClr val="333333"/>
-                </a:solidFill>
-                <a:latin typeface="メイリオ"/>
-                <a:ea typeface="メイリオ"/>
-                <a:cs typeface="メイリオ"/>
-              </a:rPr>
-              <a:t>メッセージを開封した方のうち</a:t>
-            </a:r>
-          </a:p>
-          <a:p>
-            <a:pPr algn="ctr">
-              <a:lnSpc>
-                <a:spcPct val="120000"/>
-              </a:lnSpc>
-            </a:pPr>
-            <a:r>
-              <a:rPr sz="1700" b="1">
-                <a:solidFill>
-                  <a:srgbClr val="1F285A"/>
-                </a:solidFill>
-                <a:latin typeface="メイリオ"/>
-                <a:ea typeface="メイリオ"/>
-                <a:cs typeface="メイリオ"/>
-              </a:rPr>
-              <a:t>当日に来店</a:t>
-            </a:r>
-          </a:p>
-          <a:p>
-            <a:pPr algn="ctr">
-              <a:lnSpc>
-                <a:spcPct val="120000"/>
-              </a:lnSpc>
-            </a:pPr>
-            <a:r>
-              <a:rPr sz="1700" b="1">
-                <a:solidFill>
-                  <a:srgbClr val="1F285A"/>
-                </a:solidFill>
-                <a:latin typeface="メイリオ"/>
-                <a:ea typeface="メイリオ"/>
-                <a:cs typeface="メイリオ"/>
-              </a:rPr>
-              <a:t>約40%</a:t>
-            </a:r>
-          </a:p>
-        </p:txBody>
-      </p:sp>
-      <p:sp>
-        <p:nvSpPr>
-          <p:cNvPr id="18" name="Rounded Rectangle 4"/>
-          <p:cNvSpPr/>
-          <p:nvPr/>
-        </p:nvSpPr>
-        <p:spPr>
-          <a:xfrm>
-            <a:off x="525600" y="4860000"/>
-            <a:ext cx="1080000" cy="468000"/>
-          </a:xfrm>
-          <a:prstGeom prst="roundRect">
-            <a:avLst>
-              <a:gd name="adj" fmla="val 10000"/>
-            </a:avLst>
-          </a:prstGeom>
-          <a:solidFill>
-            <a:srgbClr val="1F285A"/>
-          </a:solidFill>
-          <a:ln>
-            <a:noFill/>
-          </a:ln>
-          <a:effectLst/>
-        </p:spPr>
-        <p:style>
-          <a:lnRef idx="1">
-            <a:schemeClr val="accent1"/>
-          </a:lnRef>
-          <a:fillRef idx="3">
-            <a:schemeClr val="accent1"/>
-          </a:fillRef>
-          <a:effectRef idx="2">
-            <a:schemeClr val="accent1"/>
-          </a:effectRef>
-          <a:fontRef idx="minor">
-            <a:schemeClr val="lt1"/>
-          </a:fontRef>
-        </p:style>
-        <p:txBody>
-          <a:bodyPr wrap="square" lIns="54000" tIns="18000" rIns="54000" bIns="18000" rtlCol="0" anchor="ctr"/>
-          <a:lstStyle/>
-          <a:p>
-            <a:pPr algn="ctr">
-              <a:lnSpc>
-                <a:spcPct val="120000"/>
-              </a:lnSpc>
-            </a:pPr>
-            <a:r>
-              <a:rPr sz="1600" b="1">
-                <a:solidFill>
-                  <a:srgbClr val="FFFFFF"/>
-                </a:solidFill>
-                <a:latin typeface="メイリオ"/>
-                <a:ea typeface="メイリオ"/>
-                <a:cs typeface="メイリオ"/>
-              </a:rPr>
-              <a:t>費用</a:t>
-            </a:r>
-          </a:p>
-        </p:txBody>
-      </p:sp>
-      <p:sp>
-        <p:nvSpPr>
-          <p:cNvPr id="19" name="Rounded Rectangle 8"/>
-          <p:cNvSpPr/>
-          <p:nvPr/>
-        </p:nvSpPr>
-        <p:spPr>
-          <a:xfrm>
-            <a:off x="1677600" y="4860000"/>
-            <a:ext cx="1944000" cy="468000"/>
-          </a:xfrm>
-          <a:prstGeom prst="roundRect">
-            <a:avLst>
-              <a:gd name="adj" fmla="val 10000"/>
-            </a:avLst>
-          </a:prstGeom>
-          <a:solidFill>
-            <a:srgbClr val="06C755"/>
-          </a:solidFill>
-          <a:ln>
-            <a:noFill/>
-          </a:ln>
-          <a:effectLst/>
-        </p:spPr>
-        <p:style>
-          <a:lnRef idx="1">
-            <a:schemeClr val="accent1"/>
-          </a:lnRef>
-          <a:fillRef idx="3">
-            <a:schemeClr val="accent1"/>
-          </a:fillRef>
-          <a:effectRef idx="2">
-            <a:schemeClr val="accent1"/>
-          </a:effectRef>
-          <a:fontRef idx="minor">
-            <a:schemeClr val="lt1"/>
-          </a:fontRef>
-        </p:style>
-        <p:txBody>
-          <a:bodyPr wrap="square" lIns="54000" tIns="18000" rIns="54000" bIns="18000" rtlCol="0" anchor="ctr"/>
-          <a:lstStyle/>
-          <a:p>
-            <a:pPr algn="ctr">
-              <a:lnSpc>
-                <a:spcPct val="120000"/>
-              </a:lnSpc>
-            </a:pPr>
-            <a:r>
-              <a:rPr sz="1800" b="1">
-                <a:solidFill>
-                  <a:srgbClr val="FFFFFF"/>
-                </a:solidFill>
-                <a:latin typeface="メイリオ"/>
-                <a:ea typeface="メイリオ"/>
-                <a:cs typeface="メイリオ"/>
-              </a:rPr>
-              <a:t>初期 15万円</a:t>
-            </a:r>
-          </a:p>
-        </p:txBody>
-      </p:sp>
-      <p:sp>
-        <p:nvSpPr>
-          <p:cNvPr id="20" name="Rounded Rectangle 8"/>
-          <p:cNvSpPr/>
-          <p:nvPr/>
-        </p:nvSpPr>
-        <p:spPr>
-          <a:xfrm>
-            <a:off x="3693600" y="4860000"/>
-            <a:ext cx="1944000" cy="468000"/>
-          </a:xfrm>
-          <a:prstGeom prst="roundRect">
-            <a:avLst>
-              <a:gd name="adj" fmla="val 10000"/>
-            </a:avLst>
-          </a:prstGeom>
-          <a:solidFill>
-            <a:srgbClr val="06C755"/>
-          </a:solidFill>
-          <a:ln>
-            <a:noFill/>
-          </a:ln>
-          <a:effectLst/>
-        </p:spPr>
-        <p:style>
-          <a:lnRef idx="1">
-            <a:schemeClr val="accent1"/>
-          </a:lnRef>
-          <a:fillRef idx="3">
-            <a:schemeClr val="accent1"/>
-          </a:fillRef>
-          <a:effectRef idx="2">
-            <a:schemeClr val="accent1"/>
-          </a:effectRef>
-          <a:fontRef idx="minor">
-            <a:schemeClr val="lt1"/>
-          </a:fontRef>
-        </p:style>
-        <p:txBody>
-          <a:bodyPr wrap="square" lIns="54000" tIns="18000" rIns="54000" bIns="18000" rtlCol="0" anchor="ctr"/>
-          <a:lstStyle/>
-          <a:p>
-            <a:pPr algn="ctr">
-              <a:lnSpc>
-                <a:spcPct val="120000"/>
-              </a:lnSpc>
-            </a:pPr>
-            <a:r>
-              <a:rPr sz="1800" b="1">
-                <a:solidFill>
-                  <a:srgbClr val="FFFFFF"/>
-                </a:solidFill>
-                <a:latin typeface="メイリオ"/>
-                <a:ea typeface="メイリオ"/>
-                <a:cs typeface="メイリオ"/>
-              </a:rPr>
-              <a:t>月額 3万円〜</a:t>
-            </a:r>
-          </a:p>
-        </p:txBody>
-      </p:sp>
-      <p:sp>
-        <p:nvSpPr>
-          <p:cNvPr id="21" name="TextBox 10"/>
-          <p:cNvSpPr txBox="1"/>
-          <p:nvPr/>
-        </p:nvSpPr>
-        <p:spPr>
-          <a:xfrm>
-            <a:off x="5709600" y="4860000"/>
-            <a:ext cx="3668400" cy="468000"/>
-          </a:xfrm>
-          <a:prstGeom prst="rect">
-            <a:avLst/>
-          </a:prstGeom>
-          <a:noFill/>
-        </p:spPr>
-        <p:txBody>
-          <a:bodyPr wrap="square" lIns="0" tIns="21600" rIns="50400" bIns="21600" anchor="ctr">
-            <a:spAutoFit/>
-          </a:bodyPr>
-          <a:lstStyle/>
-          <a:p>
-            <a:pPr algn="ctr"/>
-            <a:r>
-              <a:rPr sz="1100" b="0">
-                <a:solidFill>
-                  <a:srgbClr val="7F7F7F"/>
-                </a:solidFill>
-                <a:latin typeface="メイリオ"/>
-                <a:ea typeface="メイリオ"/>
-                <a:cs typeface="メイリオ"/>
-              </a:rPr>
-              <a:t>※APIツール（Lステップ等）と併用可</a:t>
-            </a:r>
-          </a:p>
-          <a:p>
-            <a:pPr algn="ctr"/>
-            <a:r>
-              <a:rPr sz="1100" b="0">
-                <a:solidFill>
-                  <a:srgbClr val="7F7F7F"/>
-                </a:solidFill>
-                <a:latin typeface="メイリオ"/>
-                <a:ea typeface="メイリオ"/>
-                <a:cs typeface="メイリオ"/>
-              </a:rPr>
-              <a:t>※完了画面を増やす場合は追加費用</a:t>
-            </a:r>
-          </a:p>
-        </p:txBody>
-      </p:sp>
-      <p:sp>
-        <p:nvSpPr>
           <p:cNvPr id="22" name="Rounded Rectangle 4"/>
           <p:cNvSpPr/>
           <p:nvPr/>
         </p:nvSpPr>
         <p:spPr>
           <a:xfrm>
-            <a:off x="525600" y="5400000"/>
-            <a:ext cx="8852400" cy="468000"/>
+            <a:off x="525600" y="5636153"/>
+            <a:ext cx="8852400" cy="432000"/>
           </a:xfrm>
           <a:prstGeom prst="roundRect">
             <a:avLst>
@@ -4040,7 +2846,7 @@
         </p:nvSpPr>
         <p:spPr>
           <a:xfrm>
-            <a:off x="525600" y="5903999"/>
+            <a:off x="525600" y="6086153"/>
             <a:ext cx="8852400" cy="288000"/>
           </a:xfrm>
           <a:prstGeom prst="rect">
@@ -4075,7 +2881,7 @@
       </p:sp>
       <p:pic>
         <p:nvPicPr>
-          <p:cNvPr id="24" name="Picture 23" descr="thanks_icon_beauty.png"/>
+          <p:cNvPr id="24" name="実績と費用" descr="thanks_line_jisseki.png"/>
           <p:cNvPicPr>
             <a:picLocks noChangeAspect="1"/>
           </p:cNvPicPr>
@@ -4089,128 +2895,8 @@
         </p:blipFill>
         <p:spPr>
           <a:xfrm>
-            <a:off x="615600" y="2178000"/>
-            <a:ext cx="827999" cy="827999"/>
-          </a:xfrm>
-          <a:prstGeom prst="rect">
-            <a:avLst/>
-          </a:prstGeom>
-        </p:spPr>
-      </p:pic>
-      <p:pic>
-        <p:nvPicPr>
-          <p:cNvPr id="25" name="Picture 24" descr="thanks_icon_hoken.png"/>
-          <p:cNvPicPr>
-            <a:picLocks noChangeAspect="1"/>
-          </p:cNvPicPr>
-          <p:nvPr/>
-        </p:nvPicPr>
-        <p:blipFill>
-          <a:blip r:embed="rId3"/>
-          <a:stretch>
-            <a:fillRect/>
-          </a:stretch>
-        </p:blipFill>
-        <p:spPr>
-          <a:xfrm>
-            <a:off x="3614399" y="2178000"/>
-            <a:ext cx="827999" cy="827999"/>
-          </a:xfrm>
-          <a:prstGeom prst="rect">
-            <a:avLst/>
-          </a:prstGeom>
-        </p:spPr>
-      </p:pic>
-      <p:pic>
-        <p:nvPicPr>
-          <p:cNvPr id="26" name="Picture 25" descr="thanks_icon_bus.png"/>
-          <p:cNvPicPr>
-            <a:picLocks noChangeAspect="1"/>
-          </p:cNvPicPr>
-          <p:nvPr/>
-        </p:nvPicPr>
-        <p:blipFill>
-          <a:blip r:embed="rId4"/>
-          <a:stretch>
-            <a:fillRect/>
-          </a:stretch>
-        </p:blipFill>
-        <p:spPr>
-          <a:xfrm>
-            <a:off x="6613200" y="2178000"/>
-            <a:ext cx="827999" cy="827999"/>
-          </a:xfrm>
-          <a:prstGeom prst="rect">
-            <a:avLst/>
-          </a:prstGeom>
-        </p:spPr>
-      </p:pic>
-      <p:pic>
-        <p:nvPicPr>
-          <p:cNvPr id="27" name="Picture 26" descr="thanks_icon_hifuka.png"/>
-          <p:cNvPicPr>
-            <a:picLocks noChangeAspect="1"/>
-          </p:cNvPicPr>
-          <p:nvPr/>
-        </p:nvPicPr>
-        <p:blipFill>
-          <a:blip r:embed="rId5"/>
-          <a:stretch>
-            <a:fillRect/>
-          </a:stretch>
-        </p:blipFill>
-        <p:spPr>
-          <a:xfrm>
-            <a:off x="615600" y="3761999"/>
-            <a:ext cx="827999" cy="827999"/>
-          </a:xfrm>
-          <a:prstGeom prst="rect">
-            <a:avLst/>
-          </a:prstGeom>
-        </p:spPr>
-      </p:pic>
-      <p:pic>
-        <p:nvPicPr>
-          <p:cNvPr id="28" name="Picture 27" descr="thanks_icon_shushoku.png"/>
-          <p:cNvPicPr>
-            <a:picLocks noChangeAspect="1"/>
-          </p:cNvPicPr>
-          <p:nvPr/>
-        </p:nvPicPr>
-        <p:blipFill>
-          <a:blip r:embed="rId6"/>
-          <a:stretch>
-            <a:fillRect/>
-          </a:stretch>
-        </p:blipFill>
-        <p:spPr>
-          <a:xfrm>
-            <a:off x="3614399" y="3761999"/>
-            <a:ext cx="827999" cy="827999"/>
-          </a:xfrm>
-          <a:prstGeom prst="rect">
-            <a:avLst/>
-          </a:prstGeom>
-        </p:spPr>
-      </p:pic>
-      <p:pic>
-        <p:nvPicPr>
-          <p:cNvPr id="29" name="Picture 28" descr="thanks_icon_cafe.png"/>
-          <p:cNvPicPr>
-            <a:picLocks noChangeAspect="1"/>
-          </p:cNvPicPr>
-          <p:nvPr/>
-        </p:nvPicPr>
-        <p:blipFill>
-          <a:blip r:embed="rId7"/>
-          <a:stretch>
-            <a:fillRect/>
-          </a:stretch>
-        </p:blipFill>
-        <p:spPr>
-          <a:xfrm>
-            <a:off x="6613200" y="3761999"/>
-            <a:ext cx="827999" cy="827999"/>
+            <a:off x="1352999" y="1494000"/>
+            <a:ext cx="7200000" cy="4052153"/>
           </a:xfrm>
           <a:prstGeom prst="rect">
             <a:avLst/>

--- a/20261001_サンクスLINEの費用と実績.pptx
+++ b/20261001_サンクスLINEの費用と実績.pptx
@@ -2785,7 +2785,7 @@
         </p:nvSpPr>
         <p:spPr>
           <a:xfrm>
-            <a:off x="525600" y="5636153"/>
+            <a:off x="525600" y="5226330"/>
             <a:ext cx="8852400" cy="432000"/>
           </a:xfrm>
           <a:prstGeom prst="roundRect">
@@ -2846,7 +2846,7 @@
         </p:nvSpPr>
         <p:spPr>
           <a:xfrm>
-            <a:off x="525600" y="6086153"/>
+            <a:off x="525600" y="5694330"/>
             <a:ext cx="8852400" cy="288000"/>
           </a:xfrm>
           <a:prstGeom prst="rect">
@@ -2895,8 +2895,8 @@
         </p:blipFill>
         <p:spPr>
           <a:xfrm>
-            <a:off x="1352999" y="1494000"/>
-            <a:ext cx="7200000" cy="4052153"/>
+            <a:off x="1892999" y="1620000"/>
+            <a:ext cx="6120000" cy="3444330"/>
           </a:xfrm>
           <a:prstGeom prst="rect">
             <a:avLst/>
